--- a/保護我的是耶和華(崇拜版).pptx
+++ b/保護我的是耶和華(崇拜版).pptx
@@ -5,9 +5,13 @@
     <p:sldMasterId id="2147483660" r:id="rId1"/>
   </p:sldMasterIdLst>
   <p:sldIdLst>
-    <p:sldId id="256" r:id="rId2"/>
-    <p:sldId id="257" r:id="rId3"/>
-    <p:sldId id="258" r:id="rId4"/>
+    <p:sldId id="594" r:id="rId2"/>
+    <p:sldId id="595" r:id="rId3"/>
+    <p:sldId id="596" r:id="rId4"/>
+    <p:sldId id="597" r:id="rId5"/>
+    <p:sldId id="598" r:id="rId6"/>
+    <p:sldId id="599" r:id="rId7"/>
+    <p:sldId id="600" r:id="rId8"/>
   </p:sldIdLst>
   <p:sldSz cx="12192000" cy="6858000"/>
   <p:notesSz cx="6858000" cy="9144000"/>
@@ -163,10 +167,9 @@
           <a:lstStyle/>
           <a:p>
             <a:r>
-              <a:rPr lang="zh-TW" altLang="en-US" smtClean="0"/>
+              <a:rPr lang="zh-TW" altLang="en-US"/>
               <a:t>按一下以編輯母片標題樣式</a:t>
             </a:r>
-            <a:endParaRPr lang="zh-TW" altLang="en-US"/>
           </a:p>
         </p:txBody>
       </p:sp>
@@ -282,10 +285,9 @@
           </a:lstStyle>
           <a:p>
             <a:r>
-              <a:rPr lang="zh-TW" altLang="en-US" smtClean="0"/>
+              <a:rPr lang="zh-TW" altLang="en-US"/>
               <a:t>按一下以編輯母片副標題樣式</a:t>
             </a:r>
-            <a:endParaRPr lang="zh-TW" altLang="en-US"/>
           </a:p>
         </p:txBody>
       </p:sp>
@@ -306,7 +308,7 @@
           <a:p>
             <a:fld id="{90FAAFA0-02EC-4CF3-91C6-0AFCFA8ADF69}" type="datetimeFigureOut">
               <a:rPr lang="zh-TW" altLang="en-US" smtClean="0"/>
-              <a:t>2020/1/11</a:t>
+              <a:t>2024/9/6</a:t>
             </a:fld>
             <a:endParaRPr lang="zh-TW" altLang="en-US"/>
           </a:p>
@@ -395,10 +397,9 @@
           <a:lstStyle/>
           <a:p>
             <a:r>
-              <a:rPr lang="zh-TW" altLang="en-US" smtClean="0"/>
+              <a:rPr lang="zh-TW" altLang="en-US"/>
               <a:t>按一下以編輯母片標題樣式</a:t>
             </a:r>
-            <a:endParaRPr lang="zh-TW" altLang="en-US"/>
           </a:p>
         </p:txBody>
       </p:sp>
@@ -419,38 +420,37 @@
           <a:p>
             <a:pPr lvl="0"/>
             <a:r>
-              <a:rPr lang="zh-TW" altLang="en-US" smtClean="0"/>
+              <a:rPr lang="zh-TW" altLang="en-US"/>
               <a:t>按一下以編輯母片文字樣式</a:t>
             </a:r>
           </a:p>
           <a:p>
             <a:pPr lvl="1"/>
             <a:r>
-              <a:rPr lang="zh-TW" altLang="en-US" smtClean="0"/>
+              <a:rPr lang="zh-TW" altLang="en-US"/>
               <a:t>第二層</a:t>
             </a:r>
           </a:p>
           <a:p>
             <a:pPr lvl="2"/>
             <a:r>
-              <a:rPr lang="zh-TW" altLang="en-US" smtClean="0"/>
+              <a:rPr lang="zh-TW" altLang="en-US"/>
               <a:t>第三層</a:t>
             </a:r>
           </a:p>
           <a:p>
             <a:pPr lvl="3"/>
             <a:r>
-              <a:rPr lang="zh-TW" altLang="en-US" smtClean="0"/>
+              <a:rPr lang="zh-TW" altLang="en-US"/>
               <a:t>第四層</a:t>
             </a:r>
           </a:p>
           <a:p>
             <a:pPr lvl="4"/>
             <a:r>
-              <a:rPr lang="zh-TW" altLang="en-US" smtClean="0"/>
+              <a:rPr lang="zh-TW" altLang="en-US"/>
               <a:t>第五層</a:t>
             </a:r>
-            <a:endParaRPr lang="zh-TW" altLang="en-US"/>
           </a:p>
         </p:txBody>
       </p:sp>
@@ -471,7 +471,7 @@
           <a:p>
             <a:fld id="{90FAAFA0-02EC-4CF3-91C6-0AFCFA8ADF69}" type="datetimeFigureOut">
               <a:rPr lang="zh-TW" altLang="en-US" smtClean="0"/>
-              <a:t>2020/1/11</a:t>
+              <a:t>2024/9/6</a:t>
             </a:fld>
             <a:endParaRPr lang="zh-TW" altLang="en-US"/>
           </a:p>
@@ -565,10 +565,9 @@
           <a:lstStyle/>
           <a:p>
             <a:r>
-              <a:rPr lang="zh-TW" altLang="en-US" smtClean="0"/>
+              <a:rPr lang="zh-TW" altLang="en-US"/>
               <a:t>按一下以編輯母片標題樣式</a:t>
             </a:r>
-            <a:endParaRPr lang="zh-TW" altLang="en-US"/>
           </a:p>
         </p:txBody>
       </p:sp>
@@ -594,38 +593,37 @@
           <a:p>
             <a:pPr lvl="0"/>
             <a:r>
-              <a:rPr lang="zh-TW" altLang="en-US" smtClean="0"/>
+              <a:rPr lang="zh-TW" altLang="en-US"/>
               <a:t>按一下以編輯母片文字樣式</a:t>
             </a:r>
           </a:p>
           <a:p>
             <a:pPr lvl="1"/>
             <a:r>
-              <a:rPr lang="zh-TW" altLang="en-US" smtClean="0"/>
+              <a:rPr lang="zh-TW" altLang="en-US"/>
               <a:t>第二層</a:t>
             </a:r>
           </a:p>
           <a:p>
             <a:pPr lvl="2"/>
             <a:r>
-              <a:rPr lang="zh-TW" altLang="en-US" smtClean="0"/>
+              <a:rPr lang="zh-TW" altLang="en-US"/>
               <a:t>第三層</a:t>
             </a:r>
           </a:p>
           <a:p>
             <a:pPr lvl="3"/>
             <a:r>
-              <a:rPr lang="zh-TW" altLang="en-US" smtClean="0"/>
+              <a:rPr lang="zh-TW" altLang="en-US"/>
               <a:t>第四層</a:t>
             </a:r>
           </a:p>
           <a:p>
             <a:pPr lvl="4"/>
             <a:r>
-              <a:rPr lang="zh-TW" altLang="en-US" smtClean="0"/>
+              <a:rPr lang="zh-TW" altLang="en-US"/>
               <a:t>第五層</a:t>
             </a:r>
-            <a:endParaRPr lang="zh-TW" altLang="en-US"/>
           </a:p>
         </p:txBody>
       </p:sp>
@@ -646,7 +644,7 @@
           <a:p>
             <a:fld id="{90FAAFA0-02EC-4CF3-91C6-0AFCFA8ADF69}" type="datetimeFigureOut">
               <a:rPr lang="zh-TW" altLang="en-US" smtClean="0"/>
-              <a:t>2020/1/11</a:t>
+              <a:t>2024/9/6</a:t>
             </a:fld>
             <a:endParaRPr lang="zh-TW" altLang="en-US"/>
           </a:p>
@@ -735,10 +733,9 @@
           <a:lstStyle/>
           <a:p>
             <a:r>
-              <a:rPr lang="zh-TW" altLang="en-US" smtClean="0"/>
+              <a:rPr lang="zh-TW" altLang="en-US"/>
               <a:t>按一下以編輯母片標題樣式</a:t>
             </a:r>
-            <a:endParaRPr lang="zh-TW" altLang="en-US"/>
           </a:p>
         </p:txBody>
       </p:sp>
@@ -759,38 +756,37 @@
           <a:p>
             <a:pPr lvl="0"/>
             <a:r>
-              <a:rPr lang="zh-TW" altLang="en-US" smtClean="0"/>
+              <a:rPr lang="zh-TW" altLang="en-US"/>
               <a:t>按一下以編輯母片文字樣式</a:t>
             </a:r>
           </a:p>
           <a:p>
             <a:pPr lvl="1"/>
             <a:r>
-              <a:rPr lang="zh-TW" altLang="en-US" smtClean="0"/>
+              <a:rPr lang="zh-TW" altLang="en-US"/>
               <a:t>第二層</a:t>
             </a:r>
           </a:p>
           <a:p>
             <a:pPr lvl="2"/>
             <a:r>
-              <a:rPr lang="zh-TW" altLang="en-US" smtClean="0"/>
+              <a:rPr lang="zh-TW" altLang="en-US"/>
               <a:t>第三層</a:t>
             </a:r>
           </a:p>
           <a:p>
             <a:pPr lvl="3"/>
             <a:r>
-              <a:rPr lang="zh-TW" altLang="en-US" smtClean="0"/>
+              <a:rPr lang="zh-TW" altLang="en-US"/>
               <a:t>第四層</a:t>
             </a:r>
           </a:p>
           <a:p>
             <a:pPr lvl="4"/>
             <a:r>
-              <a:rPr lang="zh-TW" altLang="en-US" smtClean="0"/>
+              <a:rPr lang="zh-TW" altLang="en-US"/>
               <a:t>第五層</a:t>
             </a:r>
-            <a:endParaRPr lang="zh-TW" altLang="en-US"/>
           </a:p>
         </p:txBody>
       </p:sp>
@@ -811,7 +807,7 @@
           <a:p>
             <a:fld id="{90FAAFA0-02EC-4CF3-91C6-0AFCFA8ADF69}" type="datetimeFigureOut">
               <a:rPr lang="zh-TW" altLang="en-US" smtClean="0"/>
-              <a:t>2020/1/11</a:t>
+              <a:t>2024/9/6</a:t>
             </a:fld>
             <a:endParaRPr lang="zh-TW" altLang="en-US"/>
           </a:p>
@@ -909,10 +905,9 @@
           </a:lstStyle>
           <a:p>
             <a:r>
-              <a:rPr lang="zh-TW" altLang="en-US" smtClean="0"/>
+              <a:rPr lang="zh-TW" altLang="en-US"/>
               <a:t>按一下以編輯母片標題樣式</a:t>
             </a:r>
-            <a:endParaRPr lang="zh-TW" altLang="en-US"/>
           </a:p>
         </p:txBody>
       </p:sp>
@@ -1029,7 +1024,7 @@
           <a:p>
             <a:pPr lvl="0"/>
             <a:r>
-              <a:rPr lang="zh-TW" altLang="en-US" smtClean="0"/>
+              <a:rPr lang="zh-TW" altLang="en-US"/>
               <a:t>按一下以編輯母片文字樣式</a:t>
             </a:r>
           </a:p>
@@ -1052,7 +1047,7 @@
           <a:p>
             <a:fld id="{90FAAFA0-02EC-4CF3-91C6-0AFCFA8ADF69}" type="datetimeFigureOut">
               <a:rPr lang="zh-TW" altLang="en-US" smtClean="0"/>
-              <a:t>2020/1/11</a:t>
+              <a:t>2024/9/6</a:t>
             </a:fld>
             <a:endParaRPr lang="zh-TW" altLang="en-US"/>
           </a:p>
@@ -1141,10 +1136,9 @@
           <a:lstStyle/>
           <a:p>
             <a:r>
-              <a:rPr lang="zh-TW" altLang="en-US" smtClean="0"/>
+              <a:rPr lang="zh-TW" altLang="en-US"/>
               <a:t>按一下以編輯母片標題樣式</a:t>
             </a:r>
-            <a:endParaRPr lang="zh-TW" altLang="en-US"/>
           </a:p>
         </p:txBody>
       </p:sp>
@@ -1198,38 +1192,37 @@
           <a:p>
             <a:pPr lvl="0"/>
             <a:r>
-              <a:rPr lang="zh-TW" altLang="en-US" smtClean="0"/>
+              <a:rPr lang="zh-TW" altLang="en-US"/>
               <a:t>按一下以編輯母片文字樣式</a:t>
             </a:r>
           </a:p>
           <a:p>
             <a:pPr lvl="1"/>
             <a:r>
-              <a:rPr lang="zh-TW" altLang="en-US" smtClean="0"/>
+              <a:rPr lang="zh-TW" altLang="en-US"/>
               <a:t>第二層</a:t>
             </a:r>
           </a:p>
           <a:p>
             <a:pPr lvl="2"/>
             <a:r>
-              <a:rPr lang="zh-TW" altLang="en-US" smtClean="0"/>
+              <a:rPr lang="zh-TW" altLang="en-US"/>
               <a:t>第三層</a:t>
             </a:r>
           </a:p>
           <a:p>
             <a:pPr lvl="3"/>
             <a:r>
-              <a:rPr lang="zh-TW" altLang="en-US" smtClean="0"/>
+              <a:rPr lang="zh-TW" altLang="en-US"/>
               <a:t>第四層</a:t>
             </a:r>
           </a:p>
           <a:p>
             <a:pPr lvl="4"/>
             <a:r>
-              <a:rPr lang="zh-TW" altLang="en-US" smtClean="0"/>
+              <a:rPr lang="zh-TW" altLang="en-US"/>
               <a:t>第五層</a:t>
             </a:r>
-            <a:endParaRPr lang="zh-TW" altLang="en-US"/>
           </a:p>
         </p:txBody>
       </p:sp>
@@ -1283,38 +1276,37 @@
           <a:p>
             <a:pPr lvl="0"/>
             <a:r>
-              <a:rPr lang="zh-TW" altLang="en-US" smtClean="0"/>
+              <a:rPr lang="zh-TW" altLang="en-US"/>
               <a:t>按一下以編輯母片文字樣式</a:t>
             </a:r>
           </a:p>
           <a:p>
             <a:pPr lvl="1"/>
             <a:r>
-              <a:rPr lang="zh-TW" altLang="en-US" smtClean="0"/>
+              <a:rPr lang="zh-TW" altLang="en-US"/>
               <a:t>第二層</a:t>
             </a:r>
           </a:p>
           <a:p>
             <a:pPr lvl="2"/>
             <a:r>
-              <a:rPr lang="zh-TW" altLang="en-US" smtClean="0"/>
+              <a:rPr lang="zh-TW" altLang="en-US"/>
               <a:t>第三層</a:t>
             </a:r>
           </a:p>
           <a:p>
             <a:pPr lvl="3"/>
             <a:r>
-              <a:rPr lang="zh-TW" altLang="en-US" smtClean="0"/>
+              <a:rPr lang="zh-TW" altLang="en-US"/>
               <a:t>第四層</a:t>
             </a:r>
           </a:p>
           <a:p>
             <a:pPr lvl="4"/>
             <a:r>
-              <a:rPr lang="zh-TW" altLang="en-US" smtClean="0"/>
+              <a:rPr lang="zh-TW" altLang="en-US"/>
               <a:t>第五層</a:t>
             </a:r>
-            <a:endParaRPr lang="zh-TW" altLang="en-US"/>
           </a:p>
         </p:txBody>
       </p:sp>
@@ -1335,7 +1327,7 @@
           <a:p>
             <a:fld id="{90FAAFA0-02EC-4CF3-91C6-0AFCFA8ADF69}" type="datetimeFigureOut">
               <a:rPr lang="zh-TW" altLang="en-US" smtClean="0"/>
-              <a:t>2020/1/11</a:t>
+              <a:t>2024/9/6</a:t>
             </a:fld>
             <a:endParaRPr lang="zh-TW" altLang="en-US"/>
           </a:p>
@@ -1428,10 +1420,9 @@
           </a:lstStyle>
           <a:p>
             <a:r>
-              <a:rPr lang="zh-TW" altLang="en-US" smtClean="0"/>
+              <a:rPr lang="zh-TW" altLang="en-US"/>
               <a:t>按一下以編輯母片標題樣式</a:t>
             </a:r>
-            <a:endParaRPr lang="zh-TW" altLang="en-US"/>
           </a:p>
         </p:txBody>
       </p:sp>
@@ -1494,7 +1485,7 @@
           <a:p>
             <a:pPr lvl="0"/>
             <a:r>
-              <a:rPr lang="zh-TW" altLang="en-US" smtClean="0"/>
+              <a:rPr lang="zh-TW" altLang="en-US"/>
               <a:t>按一下以編輯母片文字樣式</a:t>
             </a:r>
           </a:p>
@@ -1550,38 +1541,37 @@
           <a:p>
             <a:pPr lvl="0"/>
             <a:r>
-              <a:rPr lang="zh-TW" altLang="en-US" smtClean="0"/>
+              <a:rPr lang="zh-TW" altLang="en-US"/>
               <a:t>按一下以編輯母片文字樣式</a:t>
             </a:r>
           </a:p>
           <a:p>
             <a:pPr lvl="1"/>
             <a:r>
-              <a:rPr lang="zh-TW" altLang="en-US" smtClean="0"/>
+              <a:rPr lang="zh-TW" altLang="en-US"/>
               <a:t>第二層</a:t>
             </a:r>
           </a:p>
           <a:p>
             <a:pPr lvl="2"/>
             <a:r>
-              <a:rPr lang="zh-TW" altLang="en-US" smtClean="0"/>
+              <a:rPr lang="zh-TW" altLang="en-US"/>
               <a:t>第三層</a:t>
             </a:r>
           </a:p>
           <a:p>
             <a:pPr lvl="3"/>
             <a:r>
-              <a:rPr lang="zh-TW" altLang="en-US" smtClean="0"/>
+              <a:rPr lang="zh-TW" altLang="en-US"/>
               <a:t>第四層</a:t>
             </a:r>
           </a:p>
           <a:p>
             <a:pPr lvl="4"/>
             <a:r>
-              <a:rPr lang="zh-TW" altLang="en-US" smtClean="0"/>
+              <a:rPr lang="zh-TW" altLang="en-US"/>
               <a:t>第五層</a:t>
             </a:r>
-            <a:endParaRPr lang="zh-TW" altLang="en-US"/>
           </a:p>
         </p:txBody>
       </p:sp>
@@ -1644,7 +1634,7 @@
           <a:p>
             <a:pPr lvl="0"/>
             <a:r>
-              <a:rPr lang="zh-TW" altLang="en-US" smtClean="0"/>
+              <a:rPr lang="zh-TW" altLang="en-US"/>
               <a:t>按一下以編輯母片文字樣式</a:t>
             </a:r>
           </a:p>
@@ -1700,38 +1690,37 @@
           <a:p>
             <a:pPr lvl="0"/>
             <a:r>
-              <a:rPr lang="zh-TW" altLang="en-US" smtClean="0"/>
+              <a:rPr lang="zh-TW" altLang="en-US"/>
               <a:t>按一下以編輯母片文字樣式</a:t>
             </a:r>
           </a:p>
           <a:p>
             <a:pPr lvl="1"/>
             <a:r>
-              <a:rPr lang="zh-TW" altLang="en-US" smtClean="0"/>
+              <a:rPr lang="zh-TW" altLang="en-US"/>
               <a:t>第二層</a:t>
             </a:r>
           </a:p>
           <a:p>
             <a:pPr lvl="2"/>
             <a:r>
-              <a:rPr lang="zh-TW" altLang="en-US" smtClean="0"/>
+              <a:rPr lang="zh-TW" altLang="en-US"/>
               <a:t>第三層</a:t>
             </a:r>
           </a:p>
           <a:p>
             <a:pPr lvl="3"/>
             <a:r>
-              <a:rPr lang="zh-TW" altLang="en-US" smtClean="0"/>
+              <a:rPr lang="zh-TW" altLang="en-US"/>
               <a:t>第四層</a:t>
             </a:r>
           </a:p>
           <a:p>
             <a:pPr lvl="4"/>
             <a:r>
-              <a:rPr lang="zh-TW" altLang="en-US" smtClean="0"/>
+              <a:rPr lang="zh-TW" altLang="en-US"/>
               <a:t>第五層</a:t>
             </a:r>
-            <a:endParaRPr lang="zh-TW" altLang="en-US"/>
           </a:p>
         </p:txBody>
       </p:sp>
@@ -1752,7 +1741,7 @@
           <a:p>
             <a:fld id="{90FAAFA0-02EC-4CF3-91C6-0AFCFA8ADF69}" type="datetimeFigureOut">
               <a:rPr lang="zh-TW" altLang="en-US" smtClean="0"/>
-              <a:t>2020/1/11</a:t>
+              <a:t>2024/9/6</a:t>
             </a:fld>
             <a:endParaRPr lang="zh-TW" altLang="en-US"/>
           </a:p>
@@ -1841,10 +1830,9 @@
           <a:lstStyle/>
           <a:p>
             <a:r>
-              <a:rPr lang="zh-TW" altLang="en-US" smtClean="0"/>
+              <a:rPr lang="zh-TW" altLang="en-US"/>
               <a:t>按一下以編輯母片標題樣式</a:t>
             </a:r>
-            <a:endParaRPr lang="zh-TW" altLang="en-US"/>
           </a:p>
         </p:txBody>
       </p:sp>
@@ -1865,7 +1853,7 @@
           <a:p>
             <a:fld id="{90FAAFA0-02EC-4CF3-91C6-0AFCFA8ADF69}" type="datetimeFigureOut">
               <a:rPr lang="zh-TW" altLang="en-US" smtClean="0"/>
-              <a:t>2020/1/11</a:t>
+              <a:t>2024/9/6</a:t>
             </a:fld>
             <a:endParaRPr lang="zh-TW" altLang="en-US"/>
           </a:p>
@@ -1955,7 +1943,7 @@
           <a:p>
             <a:fld id="{90FAAFA0-02EC-4CF3-91C6-0AFCFA8ADF69}" type="datetimeFigureOut">
               <a:rPr lang="zh-TW" altLang="en-US" smtClean="0"/>
-              <a:t>2020/1/11</a:t>
+              <a:t>2024/9/6</a:t>
             </a:fld>
             <a:endParaRPr lang="zh-TW" altLang="en-US"/>
           </a:p>
@@ -2053,10 +2041,9 @@
           </a:lstStyle>
           <a:p>
             <a:r>
-              <a:rPr lang="zh-TW" altLang="en-US" smtClean="0"/>
+              <a:rPr lang="zh-TW" altLang="en-US"/>
               <a:t>按一下以編輯母片標題樣式</a:t>
             </a:r>
-            <a:endParaRPr lang="zh-TW" altLang="en-US"/>
           </a:p>
         </p:txBody>
       </p:sp>
@@ -2110,38 +2097,37 @@
           <a:p>
             <a:pPr lvl="0"/>
             <a:r>
-              <a:rPr lang="zh-TW" altLang="en-US" smtClean="0"/>
+              <a:rPr lang="zh-TW" altLang="en-US"/>
               <a:t>按一下以編輯母片文字樣式</a:t>
             </a:r>
           </a:p>
           <a:p>
             <a:pPr lvl="1"/>
             <a:r>
-              <a:rPr lang="zh-TW" altLang="en-US" smtClean="0"/>
+              <a:rPr lang="zh-TW" altLang="en-US"/>
               <a:t>第二層</a:t>
             </a:r>
           </a:p>
           <a:p>
             <a:pPr lvl="2"/>
             <a:r>
-              <a:rPr lang="zh-TW" altLang="en-US" smtClean="0"/>
+              <a:rPr lang="zh-TW" altLang="en-US"/>
               <a:t>第三層</a:t>
             </a:r>
           </a:p>
           <a:p>
             <a:pPr lvl="3"/>
             <a:r>
-              <a:rPr lang="zh-TW" altLang="en-US" smtClean="0"/>
+              <a:rPr lang="zh-TW" altLang="en-US"/>
               <a:t>第四層</a:t>
             </a:r>
           </a:p>
           <a:p>
             <a:pPr lvl="4"/>
             <a:r>
-              <a:rPr lang="zh-TW" altLang="en-US" smtClean="0"/>
+              <a:rPr lang="zh-TW" altLang="en-US"/>
               <a:t>第五層</a:t>
             </a:r>
-            <a:endParaRPr lang="zh-TW" altLang="en-US"/>
           </a:p>
         </p:txBody>
       </p:sp>
@@ -2204,7 +2190,7 @@
           <a:p>
             <a:pPr lvl="0"/>
             <a:r>
-              <a:rPr lang="zh-TW" altLang="en-US" smtClean="0"/>
+              <a:rPr lang="zh-TW" altLang="en-US"/>
               <a:t>按一下以編輯母片文字樣式</a:t>
             </a:r>
           </a:p>
@@ -2227,7 +2213,7 @@
           <a:p>
             <a:fld id="{90FAAFA0-02EC-4CF3-91C6-0AFCFA8ADF69}" type="datetimeFigureOut">
               <a:rPr lang="zh-TW" altLang="en-US" smtClean="0"/>
-              <a:t>2020/1/11</a:t>
+              <a:t>2024/9/6</a:t>
             </a:fld>
             <a:endParaRPr lang="zh-TW" altLang="en-US"/>
           </a:p>
@@ -2325,10 +2311,9 @@
           </a:lstStyle>
           <a:p>
             <a:r>
-              <a:rPr lang="zh-TW" altLang="en-US" smtClean="0"/>
+              <a:rPr lang="zh-TW" altLang="en-US"/>
               <a:t>按一下以編輯母片標題樣式</a:t>
             </a:r>
-            <a:endParaRPr lang="zh-TW" altLang="en-US"/>
           </a:p>
         </p:txBody>
       </p:sp>
@@ -2390,10 +2375,9 @@
           </a:lstStyle>
           <a:p>
             <a:r>
-              <a:rPr lang="zh-TW" altLang="en-US" smtClean="0"/>
+              <a:rPr lang="zh-TW" altLang="en-US"/>
               <a:t>按一下圖示以新增圖片</a:t>
             </a:r>
-            <a:endParaRPr lang="zh-TW" altLang="en-US"/>
           </a:p>
         </p:txBody>
       </p:sp>
@@ -2456,7 +2440,7 @@
           <a:p>
             <a:pPr lvl="0"/>
             <a:r>
-              <a:rPr lang="zh-TW" altLang="en-US" smtClean="0"/>
+              <a:rPr lang="zh-TW" altLang="en-US"/>
               <a:t>按一下以編輯母片文字樣式</a:t>
             </a:r>
           </a:p>
@@ -2479,7 +2463,7 @@
           <a:p>
             <a:fld id="{90FAAFA0-02EC-4CF3-91C6-0AFCFA8ADF69}" type="datetimeFigureOut">
               <a:rPr lang="zh-TW" altLang="en-US" smtClean="0"/>
-              <a:t>2020/1/11</a:t>
+              <a:t>2024/9/6</a:t>
             </a:fld>
             <a:endParaRPr lang="zh-TW" altLang="en-US"/>
           </a:p>
@@ -2588,10 +2572,9 @@
           <a:lstStyle/>
           <a:p>
             <a:r>
-              <a:rPr lang="zh-TW" altLang="en-US" smtClean="0"/>
+              <a:rPr lang="zh-TW" altLang="en-US"/>
               <a:t>按一下以編輯母片標題樣式</a:t>
             </a:r>
-            <a:endParaRPr lang="zh-TW" altLang="en-US"/>
           </a:p>
         </p:txBody>
       </p:sp>
@@ -2622,38 +2605,37 @@
           <a:p>
             <a:pPr lvl="0"/>
             <a:r>
-              <a:rPr lang="zh-TW" altLang="en-US" smtClean="0"/>
+              <a:rPr lang="zh-TW" altLang="en-US"/>
               <a:t>按一下以編輯母片文字樣式</a:t>
             </a:r>
           </a:p>
           <a:p>
             <a:pPr lvl="1"/>
             <a:r>
-              <a:rPr lang="zh-TW" altLang="en-US" smtClean="0"/>
+              <a:rPr lang="zh-TW" altLang="en-US"/>
               <a:t>第二層</a:t>
             </a:r>
           </a:p>
           <a:p>
             <a:pPr lvl="2"/>
             <a:r>
-              <a:rPr lang="zh-TW" altLang="en-US" smtClean="0"/>
+              <a:rPr lang="zh-TW" altLang="en-US"/>
               <a:t>第三層</a:t>
             </a:r>
           </a:p>
           <a:p>
             <a:pPr lvl="3"/>
             <a:r>
-              <a:rPr lang="zh-TW" altLang="en-US" smtClean="0"/>
+              <a:rPr lang="zh-TW" altLang="en-US"/>
               <a:t>第四層</a:t>
             </a:r>
           </a:p>
           <a:p>
             <a:pPr lvl="4"/>
             <a:r>
-              <a:rPr lang="zh-TW" altLang="en-US" smtClean="0"/>
+              <a:rPr lang="zh-TW" altLang="en-US"/>
               <a:t>第五層</a:t>
             </a:r>
-            <a:endParaRPr lang="zh-TW" altLang="en-US"/>
           </a:p>
         </p:txBody>
       </p:sp>
@@ -2692,7 +2674,7 @@
           <a:p>
             <a:fld id="{90FAAFA0-02EC-4CF3-91C6-0AFCFA8ADF69}" type="datetimeFigureOut">
               <a:rPr lang="zh-TW" altLang="en-US" smtClean="0"/>
-              <a:t>2020/1/11</a:t>
+              <a:t>2024/9/6</a:t>
             </a:fld>
             <a:endParaRPr lang="zh-TW" altLang="en-US"/>
           </a:p>
@@ -3072,125 +3054,35 @@
             <p:ph type="title"/>
           </p:nvPr>
         </p:nvSpPr>
-        <p:spPr/>
+        <p:spPr>
+          <a:xfrm>
+            <a:off x="0" y="2660915"/>
+            <a:ext cx="12192000" cy="1143000"/>
+          </a:xfrm>
+        </p:spPr>
         <p:txBody>
           <a:bodyPr>
-            <a:normAutofit/>
+            <a:noAutofit/>
           </a:bodyPr>
           <a:lstStyle/>
           <a:p>
             <a:r>
-              <a:rPr lang="zh-TW" altLang="en-US" b="1" dirty="0" smtClean="0">
+              <a:rPr lang="zh-TW" altLang="en-US" sz="7200" b="1" i="1" dirty="0">
                 <a:solidFill>
                   <a:srgbClr val="000066"/>
                 </a:solidFill>
+                <a:effectLst>
+                  <a:outerShdw blurRad="38100" dist="38100" dir="2700000" algn="tl">
+                    <a:srgbClr val="000000">
+                      <a:alpha val="43137"/>
+                    </a:srgbClr>
+                  </a:outerShdw>
+                </a:effectLst>
                 <a:latin typeface="微軟正黑體" pitchFamily="34" charset="-120"/>
                 <a:ea typeface="微軟正黑體" pitchFamily="34" charset="-120"/>
               </a:rPr>
               <a:t>保護我的是耶和華</a:t>
             </a:r>
-            <a:endParaRPr lang="zh-TW" altLang="en-US" b="1" dirty="0">
-              <a:solidFill>
-                <a:srgbClr val="000066"/>
-              </a:solidFill>
-              <a:latin typeface="微軟正黑體" pitchFamily="34" charset="-120"/>
-              <a:ea typeface="微軟正黑體" pitchFamily="34" charset="-120"/>
-            </a:endParaRPr>
-          </a:p>
-        </p:txBody>
-      </p:sp>
-      <p:sp>
-        <p:nvSpPr>
-          <p:cNvPr id="5" name="內容版面配置區 4"/>
-          <p:cNvSpPr>
-            <a:spLocks noGrp="1"/>
-          </p:cNvSpPr>
-          <p:nvPr>
-            <p:ph idx="1"/>
-          </p:nvPr>
-        </p:nvSpPr>
-        <p:spPr/>
-        <p:txBody>
-          <a:bodyPr>
-            <a:normAutofit/>
-          </a:bodyPr>
-          <a:lstStyle/>
-          <a:p>
-            <a:pPr algn="ctr" fontAlgn="base">
-              <a:buNone/>
-            </a:pPr>
-            <a:r>
-              <a:rPr lang="zh-TW" altLang="en-US" sz="5400" b="1" dirty="0">
-                <a:solidFill>
-                  <a:srgbClr val="000066"/>
-                </a:solidFill>
-                <a:latin typeface="微軟正黑體" pitchFamily="34" charset="-120"/>
-                <a:ea typeface="微軟正黑體" pitchFamily="34" charset="-120"/>
-              </a:rPr>
-              <a:t>保護我的是耶和華</a:t>
-            </a:r>
-          </a:p>
-          <a:p>
-            <a:pPr algn="ctr" fontAlgn="base">
-              <a:buNone/>
-            </a:pPr>
-            <a:r>
-              <a:rPr lang="zh-TW" altLang="en-US" sz="5400" b="1" dirty="0">
-                <a:solidFill>
-                  <a:srgbClr val="000066"/>
-                </a:solidFill>
-                <a:latin typeface="微軟正黑體" pitchFamily="34" charset="-120"/>
-                <a:ea typeface="微軟正黑體" pitchFamily="34" charset="-120"/>
-              </a:rPr>
-              <a:t>耶和華在我的右邊陰蔽我</a:t>
-            </a:r>
-          </a:p>
-          <a:p>
-            <a:pPr algn="ctr" fontAlgn="base">
-              <a:buNone/>
-            </a:pPr>
-            <a:r>
-              <a:rPr lang="zh-TW" altLang="en-US" sz="5400" b="1" dirty="0">
-                <a:solidFill>
-                  <a:srgbClr val="000066"/>
-                </a:solidFill>
-                <a:latin typeface="微軟正黑體" pitchFamily="34" charset="-120"/>
-                <a:ea typeface="微軟正黑體" pitchFamily="34" charset="-120"/>
-              </a:rPr>
-              <a:t>白天太陽不能傷我</a:t>
-            </a:r>
-          </a:p>
-          <a:p>
-            <a:pPr algn="ctr" fontAlgn="base">
-              <a:buNone/>
-            </a:pPr>
-            <a:r>
-              <a:rPr lang="zh-TW" altLang="en-US" sz="5400" b="1" dirty="0">
-                <a:solidFill>
-                  <a:srgbClr val="000066"/>
-                </a:solidFill>
-                <a:latin typeface="微軟正黑體" pitchFamily="34" charset="-120"/>
-                <a:ea typeface="微軟正黑體" pitchFamily="34" charset="-120"/>
-              </a:rPr>
-              <a:t>夜里月亮也不能害</a:t>
-            </a:r>
-            <a:r>
-              <a:rPr lang="zh-TW" altLang="en-US" sz="5400" b="1" dirty="0">
-                <a:solidFill>
-                  <a:srgbClr val="000066"/>
-                </a:solidFill>
-                <a:latin typeface="微軟正黑體" pitchFamily="34" charset="-120"/>
-                <a:ea typeface="微軟正黑體" pitchFamily="34" charset="-120"/>
-              </a:rPr>
-              <a:t>我</a:t>
-            </a:r>
-            <a:endParaRPr lang="zh-TW" altLang="en-US" sz="5400" b="1" dirty="0">
-              <a:solidFill>
-                <a:srgbClr val="000066"/>
-              </a:solidFill>
-              <a:latin typeface="微軟正黑體" pitchFamily="34" charset="-120"/>
-              <a:ea typeface="微軟正黑體" pitchFamily="34" charset="-120"/>
-            </a:endParaRPr>
           </a:p>
         </p:txBody>
       </p:sp>
@@ -3221,23 +3113,31 @@
       </p:grpSpPr>
       <p:sp>
         <p:nvSpPr>
-          <p:cNvPr id="4" name="標題 3"/>
-          <p:cNvSpPr>
-            <a:spLocks noGrp="1"/>
-          </p:cNvSpPr>
-          <p:nvPr>
-            <p:ph type="title"/>
-          </p:nvPr>
-        </p:nvSpPr>
-        <p:spPr/>
-        <p:txBody>
-          <a:bodyPr>
+          <p:cNvPr id="5" name="內容版面配置區 4"/>
+          <p:cNvSpPr>
+            <a:spLocks noGrp="1"/>
+          </p:cNvSpPr>
+          <p:nvPr>
+            <p:ph idx="1"/>
+          </p:nvPr>
+        </p:nvSpPr>
+        <p:spPr>
+          <a:xfrm>
+            <a:off x="0" y="2084851"/>
+            <a:ext cx="12192000" cy="2404863"/>
+          </a:xfrm>
+        </p:spPr>
+        <p:txBody>
+          <a:bodyPr anchor="ctr">
             <a:normAutofit/>
           </a:bodyPr>
           <a:lstStyle/>
           <a:p>
-            <a:r>
-              <a:rPr lang="zh-TW" altLang="en-US" b="1" dirty="0" smtClean="0">
+            <a:pPr algn="ctr" fontAlgn="base">
+              <a:buNone/>
+            </a:pPr>
+            <a:r>
+              <a:rPr lang="zh-TW" altLang="en-US" sz="6400" b="1" dirty="0">
                 <a:solidFill>
                   <a:srgbClr val="000066"/>
                 </a:solidFill>
@@ -3246,53 +3146,13 @@
               </a:rPr>
               <a:t>保護我的是耶和華</a:t>
             </a:r>
-            <a:endParaRPr lang="zh-TW" altLang="en-US" b="1" dirty="0">
-              <a:solidFill>
-                <a:srgbClr val="000066"/>
-              </a:solidFill>
-              <a:latin typeface="微軟正黑體" pitchFamily="34" charset="-120"/>
-              <a:ea typeface="微軟正黑體" pitchFamily="34" charset="-120"/>
-            </a:endParaRPr>
-          </a:p>
-        </p:txBody>
-      </p:sp>
-      <p:sp>
-        <p:nvSpPr>
-          <p:cNvPr id="5" name="內容版面配置區 4"/>
-          <p:cNvSpPr>
-            <a:spLocks noGrp="1"/>
-          </p:cNvSpPr>
-          <p:nvPr>
-            <p:ph idx="1"/>
-          </p:nvPr>
-        </p:nvSpPr>
-        <p:spPr/>
-        <p:txBody>
-          <a:bodyPr>
-            <a:normAutofit/>
-          </a:bodyPr>
-          <a:lstStyle/>
+          </a:p>
           <a:p>
             <a:pPr algn="ctr" fontAlgn="base">
               <a:buNone/>
             </a:pPr>
             <a:r>
-              <a:rPr lang="zh-TW" altLang="en-US" sz="5400" b="1" dirty="0">
-                <a:solidFill>
-                  <a:srgbClr val="000066"/>
-                </a:solidFill>
-                <a:latin typeface="微軟正黑體" pitchFamily="34" charset="-120"/>
-                <a:ea typeface="微軟正黑體" pitchFamily="34" charset="-120"/>
-              </a:rPr>
-              <a:t>保護我的是耶和華</a:t>
-            </a:r>
-          </a:p>
-          <a:p>
-            <a:pPr algn="ctr" fontAlgn="base">
-              <a:buNone/>
-            </a:pPr>
-            <a:r>
-              <a:rPr lang="zh-TW" altLang="en-US" sz="5400" b="1" dirty="0">
+              <a:rPr lang="zh-TW" altLang="en-US" sz="6400" b="1" dirty="0">
                 <a:solidFill>
                   <a:srgbClr val="000066"/>
                 </a:solidFill>
@@ -3302,41 +3162,66 @@
               <a:t>耶和華在我的右邊陰蔽我</a:t>
             </a:r>
           </a:p>
-          <a:p>
-            <a:pPr algn="ctr" fontAlgn="base">
-              <a:buNone/>
-            </a:pPr>
-            <a:r>
-              <a:rPr lang="zh-TW" altLang="en-US" sz="5400" b="1" dirty="0">
+        </p:txBody>
+      </p:sp>
+      <p:sp>
+        <p:nvSpPr>
+          <p:cNvPr id="3" name="TextBox 2"/>
+          <p:cNvSpPr txBox="1"/>
+          <p:nvPr/>
+        </p:nvSpPr>
+        <p:spPr>
+          <a:xfrm>
+            <a:off x="0" y="5157193"/>
+            <a:ext cx="12192000" cy="584775"/>
+          </a:xfrm>
+          <a:prstGeom prst="rect">
+            <a:avLst/>
+          </a:prstGeom>
+          <a:noFill/>
+        </p:spPr>
+        <p:txBody>
+          <a:bodyPr wrap="square" rtlCol="0">
+            <a:spAutoFit/>
+          </a:bodyPr>
+          <a:lstStyle/>
+          <a:p>
+            <a:pPr algn="ctr"/>
+            <a:r>
+              <a:rPr lang="en-US" sz="3200" b="1" dirty="0">
                 <a:solidFill>
                   <a:srgbClr val="000066"/>
                 </a:solidFill>
-                <a:latin typeface="微軟正黑體" pitchFamily="34" charset="-120"/>
-                <a:ea typeface="微軟正黑體" pitchFamily="34" charset="-120"/>
+                <a:latin typeface="Microsoft JhengHei" panose="020B0604030504040204" pitchFamily="34" charset="-120"/>
+                <a:ea typeface="Microsoft JhengHei" panose="020B0604030504040204" pitchFamily="34" charset="-120"/>
               </a:rPr>
-              <a:t>白天太陽不能傷我</a:t>
-            </a:r>
-          </a:p>
-          <a:p>
-            <a:pPr algn="ctr" fontAlgn="base">
-              <a:buNone/>
-            </a:pPr>
-            <a:r>
-              <a:rPr lang="zh-TW" altLang="en-US" sz="5400" b="1" dirty="0">
+              <a:t>( </a:t>
+            </a:r>
+            <a:r>
+              <a:rPr lang="zh-CN" altLang="en-US" sz="3200" b="1" dirty="0">
                 <a:solidFill>
                   <a:srgbClr val="000066"/>
                 </a:solidFill>
-                <a:latin typeface="微軟正黑體" pitchFamily="34" charset="-120"/>
-                <a:ea typeface="微軟正黑體" pitchFamily="34" charset="-120"/>
+                <a:latin typeface="Microsoft JhengHei" panose="020B0604030504040204" pitchFamily="34" charset="-120"/>
+                <a:ea typeface="Microsoft JhengHei" panose="020B0604030504040204" pitchFamily="34" charset="-120"/>
               </a:rPr>
-              <a:t>夜里月亮也不能害我</a:t>
-            </a:r>
-            <a:endParaRPr lang="zh-TW" altLang="en-US" sz="5400" b="1" dirty="0">
+              <a:t>正歌</a:t>
+            </a:r>
+            <a:r>
+              <a:rPr lang="en-US" sz="3200" b="1" dirty="0">
+                <a:solidFill>
+                  <a:srgbClr val="000066"/>
+                </a:solidFill>
+                <a:latin typeface="Microsoft JhengHei" panose="020B0604030504040204" pitchFamily="34" charset="-120"/>
+                <a:ea typeface="Microsoft JhengHei" panose="020B0604030504040204" pitchFamily="34" charset="-120"/>
+              </a:rPr>
+              <a:t> )</a:t>
+            </a:r>
+            <a:endParaRPr lang="vi-VN" sz="3200" b="1" dirty="0">
               <a:solidFill>
                 <a:srgbClr val="000066"/>
               </a:solidFill>
-              <a:latin typeface="微軟正黑體" pitchFamily="34" charset="-120"/>
-              <a:ea typeface="微軟正黑體" pitchFamily="34" charset="-120"/>
+              <a:ea typeface="Microsoft JhengHei" panose="020B0604030504040204" pitchFamily="34" charset="-120"/>
             </a:endParaRPr>
           </a:p>
         </p:txBody>
@@ -3368,23 +3253,176 @@
       </p:grpSpPr>
       <p:sp>
         <p:nvSpPr>
-          <p:cNvPr id="4" name="標題 3"/>
-          <p:cNvSpPr>
-            <a:spLocks noGrp="1"/>
-          </p:cNvSpPr>
-          <p:nvPr>
-            <p:ph type="title"/>
-          </p:nvPr>
-        </p:nvSpPr>
-        <p:spPr/>
-        <p:txBody>
-          <a:bodyPr>
+          <p:cNvPr id="5" name="內容版面配置區 4"/>
+          <p:cNvSpPr>
+            <a:spLocks noGrp="1"/>
+          </p:cNvSpPr>
+          <p:nvPr>
+            <p:ph idx="1"/>
+          </p:nvPr>
+        </p:nvSpPr>
+        <p:spPr>
+          <a:xfrm>
+            <a:off x="0" y="2084851"/>
+            <a:ext cx="12192000" cy="2404863"/>
+          </a:xfrm>
+        </p:spPr>
+        <p:txBody>
+          <a:bodyPr anchor="ctr">
             <a:normAutofit/>
           </a:bodyPr>
           <a:lstStyle/>
           <a:p>
-            <a:r>
-              <a:rPr lang="zh-TW" altLang="en-US" b="1" dirty="0" smtClean="0">
+            <a:pPr algn="ctr" fontAlgn="base">
+              <a:buNone/>
+            </a:pPr>
+            <a:r>
+              <a:rPr lang="zh-TW" altLang="en-US" sz="6400" b="1" dirty="0">
+                <a:solidFill>
+                  <a:srgbClr val="000066"/>
+                </a:solidFill>
+                <a:latin typeface="微軟正黑體" pitchFamily="34" charset="-120"/>
+                <a:ea typeface="微軟正黑體" pitchFamily="34" charset="-120"/>
+              </a:rPr>
+              <a:t>白天太陽不能傷我</a:t>
+            </a:r>
+          </a:p>
+          <a:p>
+            <a:pPr algn="ctr" fontAlgn="base">
+              <a:buNone/>
+            </a:pPr>
+            <a:r>
+              <a:rPr lang="zh-TW" altLang="en-US" sz="6400" b="1" dirty="0">
+                <a:solidFill>
+                  <a:srgbClr val="000066"/>
+                </a:solidFill>
+                <a:latin typeface="微軟正黑體" pitchFamily="34" charset="-120"/>
+                <a:ea typeface="微軟正黑體" pitchFamily="34" charset="-120"/>
+              </a:rPr>
+              <a:t>夜里月亮也不能害我</a:t>
+            </a:r>
+          </a:p>
+        </p:txBody>
+      </p:sp>
+      <p:sp>
+        <p:nvSpPr>
+          <p:cNvPr id="3" name="TextBox 2"/>
+          <p:cNvSpPr txBox="1"/>
+          <p:nvPr/>
+        </p:nvSpPr>
+        <p:spPr>
+          <a:xfrm>
+            <a:off x="0" y="5157193"/>
+            <a:ext cx="12192000" cy="584775"/>
+          </a:xfrm>
+          <a:prstGeom prst="rect">
+            <a:avLst/>
+          </a:prstGeom>
+          <a:noFill/>
+        </p:spPr>
+        <p:txBody>
+          <a:bodyPr wrap="square" rtlCol="0">
+            <a:spAutoFit/>
+          </a:bodyPr>
+          <a:lstStyle/>
+          <a:p>
+            <a:pPr algn="ctr"/>
+            <a:r>
+              <a:rPr lang="en-US" sz="3200" b="1" dirty="0">
+                <a:solidFill>
+                  <a:srgbClr val="000066"/>
+                </a:solidFill>
+                <a:latin typeface="Microsoft JhengHei" panose="020B0604030504040204" pitchFamily="34" charset="-120"/>
+                <a:ea typeface="Microsoft JhengHei" panose="020B0604030504040204" pitchFamily="34" charset="-120"/>
+              </a:rPr>
+              <a:t>( </a:t>
+            </a:r>
+            <a:r>
+              <a:rPr lang="zh-CN" altLang="en-US" sz="3200" b="1" dirty="0">
+                <a:solidFill>
+                  <a:srgbClr val="000066"/>
+                </a:solidFill>
+                <a:latin typeface="Microsoft JhengHei" panose="020B0604030504040204" pitchFamily="34" charset="-120"/>
+                <a:ea typeface="Microsoft JhengHei" panose="020B0604030504040204" pitchFamily="34" charset="-120"/>
+              </a:rPr>
+              <a:t>正歌</a:t>
+            </a:r>
+            <a:r>
+              <a:rPr lang="en-US" sz="3200" b="1" dirty="0">
+                <a:solidFill>
+                  <a:srgbClr val="000066"/>
+                </a:solidFill>
+                <a:latin typeface="Microsoft JhengHei" panose="020B0604030504040204" pitchFamily="34" charset="-120"/>
+                <a:ea typeface="Microsoft JhengHei" panose="020B0604030504040204" pitchFamily="34" charset="-120"/>
+              </a:rPr>
+              <a:t> )</a:t>
+            </a:r>
+            <a:endParaRPr lang="vi-VN" sz="3200" b="1" dirty="0">
+              <a:solidFill>
+                <a:srgbClr val="000066"/>
+              </a:solidFill>
+              <a:ea typeface="Microsoft JhengHei" panose="020B0604030504040204" pitchFamily="34" charset="-120"/>
+            </a:endParaRPr>
+          </a:p>
+        </p:txBody>
+      </p:sp>
+    </p:spTree>
+    <p:extLst>
+      <p:ext uri="{BB962C8B-B14F-4D97-AF65-F5344CB8AC3E}">
+        <p14:creationId xmlns:p14="http://schemas.microsoft.com/office/powerpoint/2010/main" val="2462533831"/>
+      </p:ext>
+    </p:extLst>
+  </p:cSld>
+  <p:clrMapOvr>
+    <a:masterClrMapping/>
+  </p:clrMapOvr>
+</p:sld>
+</file>
+
+<file path=ppt/slides/slide4.xml><?xml version="1.0" encoding="utf-8"?>
+<p:sld xmlns:a="http://schemas.openxmlformats.org/drawingml/2006/main" xmlns:r="http://schemas.openxmlformats.org/officeDocument/2006/relationships" xmlns:p="http://schemas.openxmlformats.org/presentationml/2006/main">
+  <p:cSld>
+    <p:spTree>
+      <p:nvGrpSpPr>
+        <p:cNvPr id="1" name=""/>
+        <p:cNvGrpSpPr/>
+        <p:nvPr/>
+      </p:nvGrpSpPr>
+      <p:grpSpPr>
+        <a:xfrm>
+          <a:off x="0" y="0"/>
+          <a:ext cx="0" cy="0"/>
+          <a:chOff x="0" y="0"/>
+          <a:chExt cx="0" cy="0"/>
+        </a:xfrm>
+      </p:grpSpPr>
+      <p:sp>
+        <p:nvSpPr>
+          <p:cNvPr id="5" name="內容版面配置區 4"/>
+          <p:cNvSpPr>
+            <a:spLocks noGrp="1"/>
+          </p:cNvSpPr>
+          <p:nvPr>
+            <p:ph idx="1"/>
+          </p:nvPr>
+        </p:nvSpPr>
+        <p:spPr>
+          <a:xfrm>
+            <a:off x="0" y="2084851"/>
+            <a:ext cx="12192000" cy="2404863"/>
+          </a:xfrm>
+        </p:spPr>
+        <p:txBody>
+          <a:bodyPr anchor="ctr">
+            <a:normAutofit/>
+          </a:bodyPr>
+          <a:lstStyle/>
+          <a:p>
+            <a:pPr algn="ctr" fontAlgn="base">
+              <a:buNone/>
+            </a:pPr>
+            <a:r>
+              <a:rPr lang="zh-TW" altLang="en-US" sz="6400" b="1" dirty="0">
                 <a:solidFill>
                   <a:srgbClr val="000066"/>
                 </a:solidFill>
@@ -3393,16 +3431,116 @@
               </a:rPr>
               <a:t>保護我的是耶和華</a:t>
             </a:r>
-            <a:endParaRPr lang="zh-TW" altLang="en-US" b="1" dirty="0">
+          </a:p>
+          <a:p>
+            <a:pPr algn="ctr" fontAlgn="base">
+              <a:buNone/>
+            </a:pPr>
+            <a:r>
+              <a:rPr lang="zh-TW" altLang="en-US" sz="6400" b="1" dirty="0">
+                <a:solidFill>
+                  <a:srgbClr val="000066"/>
+                </a:solidFill>
+                <a:latin typeface="微軟正黑體" pitchFamily="34" charset="-120"/>
+                <a:ea typeface="微軟正黑體" pitchFamily="34" charset="-120"/>
+              </a:rPr>
+              <a:t>耶和華在我的右邊陰蔽我</a:t>
+            </a:r>
+          </a:p>
+        </p:txBody>
+      </p:sp>
+      <p:sp>
+        <p:nvSpPr>
+          <p:cNvPr id="3" name="TextBox 2"/>
+          <p:cNvSpPr txBox="1"/>
+          <p:nvPr/>
+        </p:nvSpPr>
+        <p:spPr>
+          <a:xfrm>
+            <a:off x="0" y="5157193"/>
+            <a:ext cx="12192000" cy="584775"/>
+          </a:xfrm>
+          <a:prstGeom prst="rect">
+            <a:avLst/>
+          </a:prstGeom>
+          <a:noFill/>
+        </p:spPr>
+        <p:txBody>
+          <a:bodyPr wrap="square" rtlCol="0">
+            <a:spAutoFit/>
+          </a:bodyPr>
+          <a:lstStyle/>
+          <a:p>
+            <a:pPr algn="ctr"/>
+            <a:r>
+              <a:rPr lang="en-US" sz="3200" b="1" dirty="0">
+                <a:solidFill>
+                  <a:srgbClr val="000066"/>
+                </a:solidFill>
+                <a:latin typeface="Microsoft JhengHei" panose="020B0604030504040204" pitchFamily="34" charset="-120"/>
+                <a:ea typeface="Microsoft JhengHei" panose="020B0604030504040204" pitchFamily="34" charset="-120"/>
+              </a:rPr>
+              <a:t>( </a:t>
+            </a:r>
+            <a:r>
+              <a:rPr lang="zh-CN" altLang="en-US" sz="3200" b="1" dirty="0">
+                <a:solidFill>
+                  <a:srgbClr val="000066"/>
+                </a:solidFill>
+                <a:latin typeface="Microsoft JhengHei" panose="020B0604030504040204" pitchFamily="34" charset="-120"/>
+                <a:ea typeface="Microsoft JhengHei" panose="020B0604030504040204" pitchFamily="34" charset="-120"/>
+              </a:rPr>
+              <a:t>正歌</a:t>
+            </a:r>
+            <a:r>
+              <a:rPr lang="en-US" sz="3200" b="1" dirty="0">
+                <a:solidFill>
+                  <a:srgbClr val="000066"/>
+                </a:solidFill>
+                <a:latin typeface="Microsoft JhengHei" panose="020B0604030504040204" pitchFamily="34" charset="-120"/>
+                <a:ea typeface="Microsoft JhengHei" panose="020B0604030504040204" pitchFamily="34" charset="-120"/>
+              </a:rPr>
+              <a:t> )</a:t>
+            </a:r>
+            <a:endParaRPr lang="vi-VN" sz="3200" b="1" dirty="0">
               <a:solidFill>
                 <a:srgbClr val="000066"/>
               </a:solidFill>
-              <a:latin typeface="微軟正黑體" pitchFamily="34" charset="-120"/>
-              <a:ea typeface="微軟正黑體" pitchFamily="34" charset="-120"/>
+              <a:ea typeface="Microsoft JhengHei" panose="020B0604030504040204" pitchFamily="34" charset="-120"/>
             </a:endParaRPr>
           </a:p>
         </p:txBody>
       </p:sp>
+    </p:spTree>
+    <p:extLst>
+      <p:ext uri="{BB962C8B-B14F-4D97-AF65-F5344CB8AC3E}">
+        <p14:creationId xmlns:p14="http://schemas.microsoft.com/office/powerpoint/2010/main" val="3833555515"/>
+      </p:ext>
+    </p:extLst>
+  </p:cSld>
+  <p:clrMapOvr>
+    <a:masterClrMapping/>
+  </p:clrMapOvr>
+</p:sld>
+</file>
+
+<file path=ppt/slides/slide5.xml><?xml version="1.0" encoding="utf-8"?>
+<p:sld xmlns:a="http://schemas.openxmlformats.org/drawingml/2006/main" xmlns:r="http://schemas.openxmlformats.org/officeDocument/2006/relationships" xmlns:p="http://schemas.openxmlformats.org/presentationml/2006/main">
+  <p:cSld>
+    <p:spTree>
+      <p:nvGrpSpPr>
+        <p:cNvPr id="1" name=""/>
+        <p:cNvGrpSpPr/>
+        <p:nvPr/>
+      </p:nvGrpSpPr>
+      <p:grpSpPr>
+        <a:xfrm>
+          <a:off x="0" y="0"/>
+          <a:ext cx="0" cy="0"/>
+          <a:chOff x="0" y="0"/>
+          <a:chExt cx="0" cy="0"/>
+        </a:xfrm>
+      </p:grpSpPr>
       <p:sp>
         <p:nvSpPr>
           <p:cNvPr id="5" name="內容版面配置區 4"/>
@@ -3415,13 +3553,13 @@
         </p:nvSpPr>
         <p:spPr>
           <a:xfrm>
-            <a:off x="1524000" y="1600201"/>
-            <a:ext cx="9144000" cy="4525963"/>
+            <a:off x="0" y="2084851"/>
+            <a:ext cx="12192000" cy="2404863"/>
           </a:xfrm>
         </p:spPr>
         <p:txBody>
-          <a:bodyPr>
-            <a:noAutofit/>
+          <a:bodyPr anchor="ctr">
+            <a:normAutofit/>
           </a:bodyPr>
           <a:lstStyle/>
           <a:p>
@@ -3429,7 +3567,152 @@
               <a:buNone/>
             </a:pPr>
             <a:r>
-              <a:rPr lang="zh-TW" altLang="en-US" sz="5400" b="1" dirty="0">
+              <a:rPr lang="zh-TW" altLang="en-US" sz="6400" b="1" dirty="0">
+                <a:solidFill>
+                  <a:srgbClr val="000066"/>
+                </a:solidFill>
+                <a:latin typeface="微軟正黑體" pitchFamily="34" charset="-120"/>
+                <a:ea typeface="微軟正黑體" pitchFamily="34" charset="-120"/>
+              </a:rPr>
+              <a:t>白天太陽不能傷我</a:t>
+            </a:r>
+          </a:p>
+          <a:p>
+            <a:pPr algn="ctr" fontAlgn="base">
+              <a:buNone/>
+            </a:pPr>
+            <a:r>
+              <a:rPr lang="zh-TW" altLang="en-US" sz="6400" b="1" dirty="0">
+                <a:solidFill>
+                  <a:srgbClr val="000066"/>
+                </a:solidFill>
+                <a:latin typeface="微軟正黑體" pitchFamily="34" charset="-120"/>
+                <a:ea typeface="微軟正黑體" pitchFamily="34" charset="-120"/>
+              </a:rPr>
+              <a:t>夜里月亮也不能害我</a:t>
+            </a:r>
+          </a:p>
+        </p:txBody>
+      </p:sp>
+      <p:sp>
+        <p:nvSpPr>
+          <p:cNvPr id="3" name="TextBox 2"/>
+          <p:cNvSpPr txBox="1"/>
+          <p:nvPr/>
+        </p:nvSpPr>
+        <p:spPr>
+          <a:xfrm>
+            <a:off x="0" y="5157193"/>
+            <a:ext cx="12192000" cy="584775"/>
+          </a:xfrm>
+          <a:prstGeom prst="rect">
+            <a:avLst/>
+          </a:prstGeom>
+          <a:noFill/>
+        </p:spPr>
+        <p:txBody>
+          <a:bodyPr wrap="square" rtlCol="0">
+            <a:spAutoFit/>
+          </a:bodyPr>
+          <a:lstStyle/>
+          <a:p>
+            <a:pPr algn="ctr"/>
+            <a:r>
+              <a:rPr lang="en-US" sz="3200" b="1" dirty="0">
+                <a:solidFill>
+                  <a:srgbClr val="000066"/>
+                </a:solidFill>
+                <a:latin typeface="Microsoft JhengHei" panose="020B0604030504040204" pitchFamily="34" charset="-120"/>
+                <a:ea typeface="Microsoft JhengHei" panose="020B0604030504040204" pitchFamily="34" charset="-120"/>
+              </a:rPr>
+              <a:t>( </a:t>
+            </a:r>
+            <a:r>
+              <a:rPr lang="zh-CN" altLang="en-US" sz="3200" b="1" dirty="0">
+                <a:solidFill>
+                  <a:srgbClr val="000066"/>
+                </a:solidFill>
+                <a:latin typeface="Microsoft JhengHei" panose="020B0604030504040204" pitchFamily="34" charset="-120"/>
+                <a:ea typeface="Microsoft JhengHei" panose="020B0604030504040204" pitchFamily="34" charset="-120"/>
+              </a:rPr>
+              <a:t>正歌</a:t>
+            </a:r>
+            <a:r>
+              <a:rPr lang="en-US" sz="3200" b="1" dirty="0">
+                <a:solidFill>
+                  <a:srgbClr val="000066"/>
+                </a:solidFill>
+                <a:latin typeface="Microsoft JhengHei" panose="020B0604030504040204" pitchFamily="34" charset="-120"/>
+                <a:ea typeface="Microsoft JhengHei" panose="020B0604030504040204" pitchFamily="34" charset="-120"/>
+              </a:rPr>
+              <a:t> )</a:t>
+            </a:r>
+            <a:endParaRPr lang="vi-VN" sz="3200" b="1" dirty="0">
+              <a:solidFill>
+                <a:srgbClr val="000066"/>
+              </a:solidFill>
+              <a:ea typeface="Microsoft JhengHei" panose="020B0604030504040204" pitchFamily="34" charset="-120"/>
+            </a:endParaRPr>
+          </a:p>
+        </p:txBody>
+      </p:sp>
+    </p:spTree>
+    <p:extLst>
+      <p:ext uri="{BB962C8B-B14F-4D97-AF65-F5344CB8AC3E}">
+        <p14:creationId xmlns:p14="http://schemas.microsoft.com/office/powerpoint/2010/main" val="1836486339"/>
+      </p:ext>
+    </p:extLst>
+  </p:cSld>
+  <p:clrMapOvr>
+    <a:masterClrMapping/>
+  </p:clrMapOvr>
+</p:sld>
+</file>
+
+<file path=ppt/slides/slide6.xml><?xml version="1.0" encoding="utf-8"?>
+<p:sld xmlns:a="http://schemas.openxmlformats.org/drawingml/2006/main" xmlns:r="http://schemas.openxmlformats.org/officeDocument/2006/relationships" xmlns:p="http://schemas.openxmlformats.org/presentationml/2006/main">
+  <p:cSld>
+    <p:spTree>
+      <p:nvGrpSpPr>
+        <p:cNvPr id="1" name=""/>
+        <p:cNvGrpSpPr/>
+        <p:nvPr/>
+      </p:nvGrpSpPr>
+      <p:grpSpPr>
+        <a:xfrm>
+          <a:off x="0" y="0"/>
+          <a:ext cx="0" cy="0"/>
+          <a:chOff x="0" y="0"/>
+          <a:chExt cx="0" cy="0"/>
+        </a:xfrm>
+      </p:grpSpPr>
+      <p:sp>
+        <p:nvSpPr>
+          <p:cNvPr id="5" name="內容版面配置區 4"/>
+          <p:cNvSpPr>
+            <a:spLocks noGrp="1"/>
+          </p:cNvSpPr>
+          <p:nvPr>
+            <p:ph idx="1"/>
+          </p:nvPr>
+        </p:nvSpPr>
+        <p:spPr>
+          <a:xfrm>
+            <a:off x="0" y="2084851"/>
+            <a:ext cx="12192000" cy="2404863"/>
+          </a:xfrm>
+        </p:spPr>
+        <p:txBody>
+          <a:bodyPr anchor="ctr">
+            <a:normAutofit/>
+          </a:bodyPr>
+          <a:lstStyle/>
+          <a:p>
+            <a:pPr algn="ctr" fontAlgn="base">
+              <a:buNone/>
+            </a:pPr>
+            <a:r>
+              <a:rPr lang="zh-TW" altLang="en-US" sz="6400" b="1" dirty="0">
                 <a:solidFill>
                   <a:srgbClr val="000066"/>
                 </a:solidFill>
@@ -3444,7 +3727,7 @@
               <a:buNone/>
             </a:pPr>
             <a:r>
-              <a:rPr lang="zh-TW" altLang="en-US" sz="5400" b="1" dirty="0">
+              <a:rPr lang="zh-TW" altLang="en-US" sz="6400" b="1" dirty="0">
                 <a:solidFill>
                   <a:srgbClr val="000066"/>
                 </a:solidFill>
@@ -3454,12 +3737,127 @@
               <a:t>衪會保護我腳步堅定</a:t>
             </a:r>
           </a:p>
+        </p:txBody>
+      </p:sp>
+      <p:sp>
+        <p:nvSpPr>
+          <p:cNvPr id="3" name="TextBox 2"/>
+          <p:cNvSpPr txBox="1"/>
+          <p:nvPr/>
+        </p:nvSpPr>
+        <p:spPr>
+          <a:xfrm>
+            <a:off x="0" y="5157193"/>
+            <a:ext cx="12192000" cy="584775"/>
+          </a:xfrm>
+          <a:prstGeom prst="rect">
+            <a:avLst/>
+          </a:prstGeom>
+          <a:noFill/>
+        </p:spPr>
+        <p:txBody>
+          <a:bodyPr wrap="square" rtlCol="0">
+            <a:spAutoFit/>
+          </a:bodyPr>
+          <a:lstStyle/>
+          <a:p>
+            <a:pPr algn="ctr"/>
+            <a:r>
+              <a:rPr lang="en-US" sz="3200" b="1" dirty="0">
+                <a:solidFill>
+                  <a:srgbClr val="000066"/>
+                </a:solidFill>
+                <a:latin typeface="Microsoft JhengHei" panose="020B0604030504040204" pitchFamily="34" charset="-120"/>
+                <a:ea typeface="Microsoft JhengHei" panose="020B0604030504040204" pitchFamily="34" charset="-120"/>
+              </a:rPr>
+              <a:t>( </a:t>
+            </a:r>
+            <a:r>
+              <a:rPr lang="zh-CN" altLang="en-US" sz="3200" b="1" dirty="0">
+                <a:solidFill>
+                  <a:srgbClr val="000066"/>
+                </a:solidFill>
+                <a:latin typeface="Microsoft JhengHei" panose="020B0604030504040204" pitchFamily="34" charset="-120"/>
+                <a:ea typeface="Microsoft JhengHei" panose="020B0604030504040204" pitchFamily="34" charset="-120"/>
+              </a:rPr>
+              <a:t>副歌</a:t>
+            </a:r>
+            <a:r>
+              <a:rPr lang="en-US" sz="3200" b="1" dirty="0">
+                <a:solidFill>
+                  <a:srgbClr val="000066"/>
+                </a:solidFill>
+                <a:latin typeface="Microsoft JhengHei" panose="020B0604030504040204" pitchFamily="34" charset="-120"/>
+                <a:ea typeface="Microsoft JhengHei" panose="020B0604030504040204" pitchFamily="34" charset="-120"/>
+              </a:rPr>
+              <a:t> )</a:t>
+            </a:r>
+            <a:endParaRPr lang="vi-VN" sz="3200" b="1" dirty="0">
+              <a:solidFill>
+                <a:srgbClr val="000066"/>
+              </a:solidFill>
+              <a:ea typeface="Microsoft JhengHei" panose="020B0604030504040204" pitchFamily="34" charset="-120"/>
+            </a:endParaRPr>
+          </a:p>
+        </p:txBody>
+      </p:sp>
+    </p:spTree>
+    <p:extLst>
+      <p:ext uri="{BB962C8B-B14F-4D97-AF65-F5344CB8AC3E}">
+        <p14:creationId xmlns:p14="http://schemas.microsoft.com/office/powerpoint/2010/main" val="850392702"/>
+      </p:ext>
+    </p:extLst>
+  </p:cSld>
+  <p:clrMapOvr>
+    <a:masterClrMapping/>
+  </p:clrMapOvr>
+</p:sld>
+</file>
+
+<file path=ppt/slides/slide7.xml><?xml version="1.0" encoding="utf-8"?>
+<p:sld xmlns:a="http://schemas.openxmlformats.org/drawingml/2006/main" xmlns:r="http://schemas.openxmlformats.org/officeDocument/2006/relationships" xmlns:p="http://schemas.openxmlformats.org/presentationml/2006/main">
+  <p:cSld>
+    <p:spTree>
+      <p:nvGrpSpPr>
+        <p:cNvPr id="1" name=""/>
+        <p:cNvGrpSpPr/>
+        <p:nvPr/>
+      </p:nvGrpSpPr>
+      <p:grpSpPr>
+        <a:xfrm>
+          <a:off x="0" y="0"/>
+          <a:ext cx="0" cy="0"/>
+          <a:chOff x="0" y="0"/>
+          <a:chExt cx="0" cy="0"/>
+        </a:xfrm>
+      </p:grpSpPr>
+      <p:sp>
+        <p:nvSpPr>
+          <p:cNvPr id="5" name="內容版面配置區 4"/>
+          <p:cNvSpPr>
+            <a:spLocks noGrp="1"/>
+          </p:cNvSpPr>
+          <p:nvPr>
+            <p:ph idx="1"/>
+          </p:nvPr>
+        </p:nvSpPr>
+        <p:spPr>
+          <a:xfrm>
+            <a:off x="0" y="2084851"/>
+            <a:ext cx="12192000" cy="2404863"/>
+          </a:xfrm>
+        </p:spPr>
+        <p:txBody>
+          <a:bodyPr anchor="ctr">
+            <a:normAutofit/>
+          </a:bodyPr>
+          <a:lstStyle/>
           <a:p>
             <a:pPr algn="ctr" fontAlgn="base">
               <a:buNone/>
             </a:pPr>
             <a:r>
-              <a:rPr lang="zh-TW" altLang="en-US" sz="5400" b="1" dirty="0">
+              <a:rPr lang="zh-TW" altLang="en-US" sz="6400" b="1" dirty="0">
                 <a:solidFill>
                   <a:srgbClr val="000066"/>
                 </a:solidFill>
@@ -3474,7 +3872,7 @@
               <a:buNone/>
             </a:pPr>
             <a:r>
-              <a:rPr lang="zh-TW" altLang="en-US" sz="5400" b="1" dirty="0">
+              <a:rPr lang="zh-TW" altLang="en-US" sz="6400" b="1" dirty="0">
                 <a:solidFill>
                   <a:srgbClr val="000066"/>
                 </a:solidFill>
@@ -3486,7 +3884,74 @@
           </a:p>
         </p:txBody>
       </p:sp>
+      <p:sp>
+        <p:nvSpPr>
+          <p:cNvPr id="3" name="TextBox 2"/>
+          <p:cNvSpPr txBox="1"/>
+          <p:nvPr/>
+        </p:nvSpPr>
+        <p:spPr>
+          <a:xfrm>
+            <a:off x="0" y="5157193"/>
+            <a:ext cx="12192000" cy="584775"/>
+          </a:xfrm>
+          <a:prstGeom prst="rect">
+            <a:avLst/>
+          </a:prstGeom>
+          <a:noFill/>
+        </p:spPr>
+        <p:txBody>
+          <a:bodyPr wrap="square" rtlCol="0">
+            <a:spAutoFit/>
+          </a:bodyPr>
+          <a:lstStyle/>
+          <a:p>
+            <a:pPr algn="ctr"/>
+            <a:r>
+              <a:rPr lang="en-US" sz="3200" b="1" dirty="0">
+                <a:solidFill>
+                  <a:srgbClr val="000066"/>
+                </a:solidFill>
+                <a:latin typeface="Microsoft JhengHei" panose="020B0604030504040204" pitchFamily="34" charset="-120"/>
+                <a:ea typeface="Microsoft JhengHei" panose="020B0604030504040204" pitchFamily="34" charset="-120"/>
+              </a:rPr>
+              <a:t>( </a:t>
+            </a:r>
+            <a:r>
+              <a:rPr lang="zh-CN" altLang="en-US" sz="3200" b="1" dirty="0">
+                <a:solidFill>
+                  <a:srgbClr val="000066"/>
+                </a:solidFill>
+                <a:latin typeface="Microsoft JhengHei" panose="020B0604030504040204" pitchFamily="34" charset="-120"/>
+                <a:ea typeface="Microsoft JhengHei" panose="020B0604030504040204" pitchFamily="34" charset="-120"/>
+              </a:rPr>
+              <a:t>副歌</a:t>
+            </a:r>
+            <a:r>
+              <a:rPr lang="en-US" sz="3200" b="1" dirty="0">
+                <a:solidFill>
+                  <a:srgbClr val="000066"/>
+                </a:solidFill>
+                <a:latin typeface="Microsoft JhengHei" panose="020B0604030504040204" pitchFamily="34" charset="-120"/>
+                <a:ea typeface="Microsoft JhengHei" panose="020B0604030504040204" pitchFamily="34" charset="-120"/>
+              </a:rPr>
+              <a:t> )</a:t>
+            </a:r>
+            <a:endParaRPr lang="vi-VN" sz="3200" b="1" dirty="0">
+              <a:solidFill>
+                <a:srgbClr val="000066"/>
+              </a:solidFill>
+              <a:ea typeface="Microsoft JhengHei" panose="020B0604030504040204" pitchFamily="34" charset="-120"/>
+            </a:endParaRPr>
+          </a:p>
+        </p:txBody>
+      </p:sp>
     </p:spTree>
+    <p:extLst>
+      <p:ext uri="{BB962C8B-B14F-4D97-AF65-F5344CB8AC3E}">
+        <p14:creationId xmlns:p14="http://schemas.microsoft.com/office/powerpoint/2010/main" val="1443439803"/>
+      </p:ext>
+    </p:extLst>
   </p:cSld>
   <p:clrMapOvr>
     <a:masterClrMapping/>
